--- a/artifacts/ClearSignal_RapidFire_3min.pptx
+++ b/artifacts/ClearSignal_RapidFire_3min.pptx
@@ -11791,7 +11791,7 @@
         <p:spPr>
           <a:xfrm>
             <a:off x="640080" y="1783080"/>
-            <a:ext cx="10881360" cy="4206240"/>
+            <a:ext cx="10881360" cy="4500000"/>
           </a:xfrm>
           <a:prstGeom prst="rect">
             <a:avLst/>
@@ -11800,7 +11800,7 @@
         </p:spPr>
         <p:txBody>
           <a:bodyPr wrap="square">
-            <a:spAutoFit/>
+            <a:normAutofit fontScale="88000" lnSpcReduction="10000"/>
           </a:bodyPr>
           <a:lstStyle/>
           <a:p>
@@ -11926,6 +11926,31 @@
                 <a:latin typeface="Calibri"/>
               </a:rPr>
               <a:t>compiles the above into a one-page, clinician-readable document — under a deterministic safety layer that never diagnoses.</a:t>
+            </a:r>
+          </a:p>
+          <a:p>
+            <a:pPr>
+              <a:spcAft>
+                <a:spcPts val="1400"/>
+              </a:spcAft>
+            </a:pPr>
+            <a:r>
+              <a:rPr sz="1700" b="1">
+                <a:solidFill>
+                  <a:srgbClr val="FFFFFF"/>
+                </a:solidFill>
+                <a:latin typeface="Calibri"/>
+              </a:rPr>
+              <a:t>•  Confidence rail  </a:t>
+            </a:r>
+            <a:r>
+              <a:rPr sz="1700">
+                <a:solidFill>
+                  <a:srgbClr val="C9D6E3"/>
+                </a:solidFill>
+                <a:latin typeface="Calibri"/>
+              </a:rPr>
+              <a:t>beside every answer renders the same retrieval-confidence score the eval harness computes — never invented, never buried in prose.</a:t>
             </a:r>
           </a:p>
         </p:txBody>
